--- a/output_pptx/Away_In_A_Manger.pptx
+++ b/output_pptx/Away_In_A_Manger.pptx
@@ -3109,8 +3109,8 @@
         </p:nvSpPr>
         <p:spPr>
           <a:xfrm>
-            <a:off x="594360" y="2258568"/>
-            <a:ext cx="11002975" cy="685800"/>
+            <a:off x="640080" y="2052828"/>
+            <a:ext cx="10911535" cy="731520"/>
           </a:xfrm>
           <a:prstGeom prst="rect">
             <a:avLst/>
@@ -3125,7 +3125,7 @@
           <a:p>
             <a:pPr algn="ctr"/>
             <a:r>
-              <a:rPr sz="4400" b="1" i="0">
+              <a:rPr sz="4800" b="1" i="0">
                 <a:solidFill>
                   <a:srgbClr val="FFFFFF"/>
                 </a:solidFill>
@@ -3144,8 +3144,8 @@
         </p:nvSpPr>
         <p:spPr>
           <a:xfrm>
-            <a:off x="594360" y="2980944"/>
-            <a:ext cx="11002975" cy="347472"/>
+            <a:off x="640080" y="2985516"/>
+            <a:ext cx="10911535" cy="731520"/>
           </a:xfrm>
           <a:prstGeom prst="rect">
             <a:avLst/>
@@ -3160,83 +3160,13 @@
           <a:p>
             <a:pPr algn="ctr"/>
             <a:r>
-              <a:rPr sz="2200" b="0" i="1">
-                <a:solidFill>
-                  <a:srgbClr val="8C8C8C"/>
-                </a:solidFill>
-                <a:latin typeface="Arial"/>
-              </a:rPr>
-              <a:t/>
-            </a:r>
-          </a:p>
-        </p:txBody>
-      </p:sp>
-      <p:sp>
-        <p:nvSpPr>
-          <p:cNvPr id="4" name="TextBox 3"/>
-          <p:cNvSpPr txBox="1"/>
-          <p:nvPr/>
-        </p:nvSpPr>
-        <p:spPr>
-          <a:xfrm>
-            <a:off x="594360" y="3529584"/>
-            <a:ext cx="11002975" cy="685800"/>
-          </a:xfrm>
-          <a:prstGeom prst="rect">
-            <a:avLst/>
-          </a:prstGeom>
-          <a:noFill/>
-        </p:spPr>
-        <p:txBody>
-          <a:bodyPr wrap="square">
-            <a:spAutoFit/>
-          </a:bodyPr>
-          <a:lstStyle/>
-          <a:p>
-            <a:pPr algn="ctr"/>
-            <a:r>
-              <a:rPr sz="4400" b="1" i="0">
+              <a:rPr sz="4800" b="1" i="0">
                 <a:solidFill>
                   <a:srgbClr val="FFFFFF"/>
                 </a:solidFill>
                 <a:latin typeface="Arial"/>
               </a:rPr>
               <a:t>Num berço humilde, Jesus nasceu</a:t>
-            </a:r>
-          </a:p>
-        </p:txBody>
-      </p:sp>
-      <p:sp>
-        <p:nvSpPr>
-          <p:cNvPr id="5" name="TextBox 4"/>
-          <p:cNvSpPr txBox="1"/>
-          <p:nvPr/>
-        </p:nvSpPr>
-        <p:spPr>
-          <a:xfrm>
-            <a:off x="594360" y="4251960"/>
-            <a:ext cx="11002975" cy="347472"/>
-          </a:xfrm>
-          <a:prstGeom prst="rect">
-            <a:avLst/>
-          </a:prstGeom>
-          <a:noFill/>
-        </p:spPr>
-        <p:txBody>
-          <a:bodyPr wrap="square">
-            <a:spAutoFit/>
-          </a:bodyPr>
-          <a:lstStyle/>
-          <a:p>
-            <a:pPr algn="ctr"/>
-            <a:r>
-              <a:rPr sz="2200" b="0" i="1">
-                <a:solidFill>
-                  <a:srgbClr val="8C8C8C"/>
-                </a:solidFill>
-                <a:latin typeface="Arial"/>
-              </a:rPr>
-              <a:t/>
             </a:r>
           </a:p>
         </p:txBody>
@@ -3275,8 +3205,8 @@
         </p:nvSpPr>
         <p:spPr>
           <a:xfrm>
-            <a:off x="594360" y="2258568"/>
-            <a:ext cx="11002975" cy="685800"/>
+            <a:off x="640080" y="2052828"/>
+            <a:ext cx="10911535" cy="731520"/>
           </a:xfrm>
           <a:prstGeom prst="rect">
             <a:avLst/>
@@ -3291,7 +3221,7 @@
           <a:p>
             <a:pPr algn="ctr"/>
             <a:r>
-              <a:rPr sz="4400" b="1" i="0">
+              <a:rPr sz="4800" b="1" i="0">
                 <a:solidFill>
                   <a:srgbClr val="FFFFFF"/>
                 </a:solidFill>
@@ -3310,8 +3240,8 @@
         </p:nvSpPr>
         <p:spPr>
           <a:xfrm>
-            <a:off x="594360" y="2980944"/>
-            <a:ext cx="11002975" cy="347472"/>
+            <a:off x="640080" y="2985516"/>
+            <a:ext cx="10911535" cy="731520"/>
           </a:xfrm>
           <a:prstGeom prst="rect">
             <a:avLst/>
@@ -3326,83 +3256,13 @@
           <a:p>
             <a:pPr algn="ctr"/>
             <a:r>
-              <a:rPr sz="2200" b="0" i="1">
-                <a:solidFill>
-                  <a:srgbClr val="8C8C8C"/>
-                </a:solidFill>
-                <a:latin typeface="Arial"/>
-              </a:rPr>
-              <a:t/>
-            </a:r>
-          </a:p>
-        </p:txBody>
-      </p:sp>
-      <p:sp>
-        <p:nvSpPr>
-          <p:cNvPr id="4" name="TextBox 3"/>
-          <p:cNvSpPr txBox="1"/>
-          <p:nvPr/>
-        </p:nvSpPr>
-        <p:spPr>
-          <a:xfrm>
-            <a:off x="594360" y="3529584"/>
-            <a:ext cx="11002975" cy="685800"/>
-          </a:xfrm>
-          <a:prstGeom prst="rect">
-            <a:avLst/>
-          </a:prstGeom>
-          <a:noFill/>
-        </p:spPr>
-        <p:txBody>
-          <a:bodyPr wrap="square">
-            <a:spAutoFit/>
-          </a:bodyPr>
-          <a:lstStyle/>
-          <a:p>
-            <a:pPr algn="ctr"/>
-            <a:r>
-              <a:rPr sz="4141" b="1" i="0">
+              <a:rPr sz="4500" b="1" i="0">
                 <a:solidFill>
                   <a:srgbClr val="FFFFFF"/>
                 </a:solidFill>
                 <a:latin typeface="Arial"/>
               </a:rPr>
               <a:t>Estrelas brilhando banhavam de luz</a:t>
-            </a:r>
-          </a:p>
-        </p:txBody>
-      </p:sp>
-      <p:sp>
-        <p:nvSpPr>
-          <p:cNvPr id="5" name="TextBox 4"/>
-          <p:cNvSpPr txBox="1"/>
-          <p:nvPr/>
-        </p:nvSpPr>
-        <p:spPr>
-          <a:xfrm>
-            <a:off x="594360" y="4251960"/>
-            <a:ext cx="11002975" cy="347472"/>
-          </a:xfrm>
-          <a:prstGeom prst="rect">
-            <a:avLst/>
-          </a:prstGeom>
-          <a:noFill/>
-        </p:spPr>
-        <p:txBody>
-          <a:bodyPr wrap="square">
-            <a:spAutoFit/>
-          </a:bodyPr>
-          <a:lstStyle/>
-          <a:p>
-            <a:pPr algn="ctr"/>
-            <a:r>
-              <a:rPr sz="2200" b="0" i="1">
-                <a:solidFill>
-                  <a:srgbClr val="8C8C8C"/>
-                </a:solidFill>
-                <a:latin typeface="Arial"/>
-              </a:rPr>
-              <a:t/>
             </a:r>
           </a:p>
         </p:txBody>
@@ -3441,8 +3301,8 @@
         </p:nvSpPr>
         <p:spPr>
           <a:xfrm>
-            <a:off x="594360" y="1837944"/>
-            <a:ext cx="11002975" cy="685800"/>
+            <a:off x="640080" y="1650492"/>
+            <a:ext cx="10911535" cy="731520"/>
           </a:xfrm>
           <a:prstGeom prst="rect">
             <a:avLst/>
@@ -3457,7 +3317,7 @@
           <a:p>
             <a:pPr algn="ctr"/>
             <a:r>
-              <a:rPr sz="4400" b="1" i="0">
+              <a:rPr sz="4800" b="1" i="0">
                 <a:solidFill>
                   <a:srgbClr val="FFFFFF"/>
                 </a:solidFill>
@@ -3476,8 +3336,8 @@
         </p:nvSpPr>
         <p:spPr>
           <a:xfrm>
-            <a:off x="594360" y="2560320"/>
-            <a:ext cx="11002975" cy="384048"/>
+            <a:off x="640080" y="2418588"/>
+            <a:ext cx="10911535" cy="365760"/>
           </a:xfrm>
           <a:prstGeom prst="rect">
             <a:avLst/>
@@ -3492,9 +3352,9 @@
           <a:p>
             <a:pPr algn="ctr"/>
             <a:r>
-              <a:rPr sz="1976" b="0" i="1">
+              <a:rPr sz="2400" b="0" i="1">
                 <a:solidFill>
-                  <a:srgbClr val="B4B4B4"/>
+                  <a:srgbClr val="AAAAAA"/>
                 </a:solidFill>
                 <a:latin typeface="Arial"/>
               </a:rPr>
@@ -3511,8 +3371,8 @@
         </p:nvSpPr>
         <p:spPr>
           <a:xfrm>
-            <a:off x="594360" y="2980944"/>
-            <a:ext cx="11002975" cy="347472"/>
+            <a:off x="640080" y="2985516"/>
+            <a:ext cx="10911535" cy="731520"/>
           </a:xfrm>
           <a:prstGeom prst="rect">
             <a:avLst/>
@@ -3527,13 +3387,13 @@
           <a:p>
             <a:pPr algn="ctr"/>
             <a:r>
-              <a:rPr sz="2000" b="0" i="1">
+              <a:rPr sz="4800" b="1" i="0">
                 <a:solidFill>
-                  <a:srgbClr val="8C8C8C"/>
+                  <a:srgbClr val="FFFFFF"/>
                 </a:solidFill>
                 <a:latin typeface="Arial"/>
               </a:rPr>
-              <a:t/>
+              <a:t>月星空に輝 -き   平和な姿見守る</a:t>
             </a:r>
           </a:p>
         </p:txBody>
@@ -3546,8 +3406,8 @@
         </p:nvSpPr>
         <p:spPr>
           <a:xfrm>
-            <a:off x="594360" y="3529584"/>
-            <a:ext cx="11002975" cy="685800"/>
+            <a:off x="640080" y="3753612"/>
+            <a:ext cx="10911535" cy="365760"/>
           </a:xfrm>
           <a:prstGeom prst="rect">
             <a:avLst/>
@@ -3562,13 +3422,13 @@
           <a:p>
             <a:pPr algn="ctr"/>
             <a:r>
-              <a:rPr sz="4400" b="1" i="0">
+              <a:rPr sz="2400" b="0" i="1">
                 <a:solidFill>
-                  <a:srgbClr val="FFFFFF"/>
+                  <a:srgbClr val="AAAAAA"/>
                 </a:solidFill>
                 <a:latin typeface="Arial"/>
               </a:rPr>
-              <a:t>月星空に輝 -き   平和な姿見守る</a:t>
+              <a:t>tsuki hoshi sora ni kagayaki heiwana sugata mimamoru</a:t>
             </a:r>
           </a:p>
         </p:txBody>
@@ -3581,8 +3441,8 @@
         </p:nvSpPr>
         <p:spPr>
           <a:xfrm>
-            <a:off x="594360" y="4251960"/>
-            <a:ext cx="11002975" cy="384048"/>
+            <a:off x="640080" y="4530852"/>
+            <a:ext cx="10911535" cy="310896"/>
           </a:xfrm>
           <a:prstGeom prst="rect">
             <a:avLst/>
@@ -3597,13 +3457,13 @@
           <a:p>
             <a:pPr algn="ctr"/>
             <a:r>
-              <a:rPr sz="1938" b="0" i="1">
+              <a:rPr sz="2000" b="0" i="1">
                 <a:solidFill>
-                  <a:srgbClr val="B4B4B4"/>
+                  <a:srgbClr val="828282"/>
                 </a:solidFill>
                 <a:latin typeface="Arial"/>
               </a:rPr>
-              <a:t>tsuki hoshi sora ni kagayaki heiwana sugata mimamoru</a:t>
+              <a:t>Num Berço de Palhas</a:t>
             </a:r>
           </a:p>
         </p:txBody>
@@ -3616,8 +3476,8 @@
         </p:nvSpPr>
         <p:spPr>
           <a:xfrm>
-            <a:off x="594360" y="4672584"/>
-            <a:ext cx="11002975" cy="347472"/>
+            <a:off x="640080" y="4896612"/>
+            <a:ext cx="10911535" cy="310896"/>
           </a:xfrm>
           <a:prstGeom prst="rect">
             <a:avLst/>
@@ -3634,11 +3494,11 @@
             <a:r>
               <a:rPr sz="2000" b="0" i="1">
                 <a:solidFill>
-                  <a:srgbClr val="8C8C8C"/>
+                  <a:srgbClr val="828282"/>
                 </a:solidFill>
                 <a:latin typeface="Arial"/>
               </a:rPr>
-              <a:t/>
+              <a:t>Num berço humilde, Jesus nasceu</a:t>
             </a:r>
           </a:p>
         </p:txBody>
@@ -3677,8 +3537,8 @@
         </p:nvSpPr>
         <p:spPr>
           <a:xfrm>
-            <a:off x="594360" y="2258568"/>
-            <a:ext cx="11002975" cy="685800"/>
+            <a:off x="640080" y="2052828"/>
+            <a:ext cx="10911535" cy="731520"/>
           </a:xfrm>
           <a:prstGeom prst="rect">
             <a:avLst/>
@@ -3693,7 +3553,7 @@
           <a:p>
             <a:pPr algn="ctr"/>
             <a:r>
-              <a:rPr sz="4400" b="1" i="0">
+              <a:rPr sz="4800" b="1" i="0">
                 <a:solidFill>
                   <a:srgbClr val="FFFFFF"/>
                 </a:solidFill>
@@ -3712,8 +3572,8 @@
         </p:nvSpPr>
         <p:spPr>
           <a:xfrm>
-            <a:off x="594360" y="2980944"/>
-            <a:ext cx="11002975" cy="347472"/>
+            <a:off x="640080" y="2985516"/>
+            <a:ext cx="10911535" cy="731520"/>
           </a:xfrm>
           <a:prstGeom prst="rect">
             <a:avLst/>
@@ -3728,83 +3588,13 @@
           <a:p>
             <a:pPr algn="ctr"/>
             <a:r>
-              <a:rPr sz="2200" b="0" i="1">
-                <a:solidFill>
-                  <a:srgbClr val="8C8C8C"/>
-                </a:solidFill>
-                <a:latin typeface="Arial"/>
-              </a:rPr>
-              <a:t/>
-            </a:r>
-          </a:p>
-        </p:txBody>
-      </p:sp>
-      <p:sp>
-        <p:nvSpPr>
-          <p:cNvPr id="4" name="TextBox 3"/>
-          <p:cNvSpPr txBox="1"/>
-          <p:nvPr/>
-        </p:nvSpPr>
-        <p:spPr>
-          <a:xfrm>
-            <a:off x="594360" y="3529584"/>
-            <a:ext cx="11002975" cy="685800"/>
-          </a:xfrm>
-          <a:prstGeom prst="rect">
-            <a:avLst/>
-          </a:prstGeom>
-          <a:noFill/>
-        </p:spPr>
-        <p:txBody>
-          <a:bodyPr wrap="square">
-            <a:spAutoFit/>
-          </a:bodyPr>
-          <a:lstStyle/>
-          <a:p>
-            <a:pPr algn="ctr"/>
-            <a:r>
-              <a:rPr sz="4266" b="1" i="0">
+              <a:rPr sz="4600" b="1" i="0">
                 <a:solidFill>
                   <a:srgbClr val="FFFFFF"/>
                 </a:solidFill>
                 <a:latin typeface="Arial"/>
               </a:rPr>
               <a:t>Mugiram os bois e Jesus despertou</a:t>
-            </a:r>
-          </a:p>
-        </p:txBody>
-      </p:sp>
-      <p:sp>
-        <p:nvSpPr>
-          <p:cNvPr id="5" name="TextBox 4"/>
-          <p:cNvSpPr txBox="1"/>
-          <p:nvPr/>
-        </p:nvSpPr>
-        <p:spPr>
-          <a:xfrm>
-            <a:off x="594360" y="4251960"/>
-            <a:ext cx="11002975" cy="347472"/>
-          </a:xfrm>
-          <a:prstGeom prst="rect">
-            <a:avLst/>
-          </a:prstGeom>
-          <a:noFill/>
-        </p:spPr>
-        <p:txBody>
-          <a:bodyPr wrap="square">
-            <a:spAutoFit/>
-          </a:bodyPr>
-          <a:lstStyle/>
-          <a:p>
-            <a:pPr algn="ctr"/>
-            <a:r>
-              <a:rPr sz="2200" b="0" i="1">
-                <a:solidFill>
-                  <a:srgbClr val="8C8C8C"/>
-                </a:solidFill>
-                <a:latin typeface="Arial"/>
-              </a:rPr>
-              <a:t/>
             </a:r>
           </a:p>
         </p:txBody>
@@ -3843,8 +3633,8 @@
         </p:nvSpPr>
         <p:spPr>
           <a:xfrm>
-            <a:off x="594360" y="2258568"/>
-            <a:ext cx="11002975" cy="685800"/>
+            <a:off x="640080" y="2052828"/>
+            <a:ext cx="10911535" cy="731520"/>
           </a:xfrm>
           <a:prstGeom prst="rect">
             <a:avLst/>
@@ -3859,7 +3649,7 @@
           <a:p>
             <a:pPr algn="ctr"/>
             <a:r>
-              <a:rPr sz="4022" b="1" i="0">
+              <a:rPr sz="4300" b="1" i="0">
                 <a:solidFill>
                   <a:srgbClr val="FFFFFF"/>
                 </a:solidFill>
@@ -3878,8 +3668,8 @@
         </p:nvSpPr>
         <p:spPr>
           <a:xfrm>
-            <a:off x="594360" y="2980944"/>
-            <a:ext cx="11002975" cy="347472"/>
+            <a:off x="640080" y="2985516"/>
+            <a:ext cx="10911535" cy="731520"/>
           </a:xfrm>
           <a:prstGeom prst="rect">
             <a:avLst/>
@@ -3894,83 +3684,13 @@
           <a:p>
             <a:pPr algn="ctr"/>
             <a:r>
-              <a:rPr sz="2200" b="0" i="1">
-                <a:solidFill>
-                  <a:srgbClr val="8C8C8C"/>
-                </a:solidFill>
-                <a:latin typeface="Arial"/>
-              </a:rPr>
-              <a:t/>
-            </a:r>
-          </a:p>
-        </p:txBody>
-      </p:sp>
-      <p:sp>
-        <p:nvSpPr>
-          <p:cNvPr id="4" name="TextBox 3"/>
-          <p:cNvSpPr txBox="1"/>
-          <p:nvPr/>
-        </p:nvSpPr>
-        <p:spPr>
-          <a:xfrm>
-            <a:off x="594360" y="3529584"/>
-            <a:ext cx="11002975" cy="685800"/>
-          </a:xfrm>
-          <a:prstGeom prst="rect">
-            <a:avLst/>
-          </a:prstGeom>
-          <a:noFill/>
-        </p:spPr>
-        <p:txBody>
-          <a:bodyPr wrap="square">
-            <a:spAutoFit/>
-          </a:bodyPr>
-          <a:lstStyle/>
-          <a:p>
-            <a:pPr algn="ctr"/>
-            <a:r>
-              <a:rPr sz="3805" b="1" i="0">
+              <a:rPr sz="4100" b="1" i="0">
                 <a:solidFill>
                   <a:srgbClr val="FFFFFF"/>
                 </a:solidFill>
                 <a:latin typeface="Arial"/>
               </a:rPr>
               <a:t>Jesus, eu Te amo; com Teu terno olhar</a:t>
-            </a:r>
-          </a:p>
-        </p:txBody>
-      </p:sp>
-      <p:sp>
-        <p:nvSpPr>
-          <p:cNvPr id="5" name="TextBox 4"/>
-          <p:cNvSpPr txBox="1"/>
-          <p:nvPr/>
-        </p:nvSpPr>
-        <p:spPr>
-          <a:xfrm>
-            <a:off x="594360" y="4251960"/>
-            <a:ext cx="11002975" cy="347472"/>
-          </a:xfrm>
-          <a:prstGeom prst="rect">
-            <a:avLst/>
-          </a:prstGeom>
-          <a:noFill/>
-        </p:spPr>
-        <p:txBody>
-          <a:bodyPr wrap="square">
-            <a:spAutoFit/>
-          </a:bodyPr>
-          <a:lstStyle/>
-          <a:p>
-            <a:pPr algn="ctr"/>
-            <a:r>
-              <a:rPr sz="2200" b="0" i="1">
-                <a:solidFill>
-                  <a:srgbClr val="8C8C8C"/>
-                </a:solidFill>
-                <a:latin typeface="Arial"/>
-              </a:rPr>
-              <a:t/>
             </a:r>
           </a:p>
         </p:txBody>
@@ -4009,8 +3729,8 @@
         </p:nvSpPr>
         <p:spPr>
           <a:xfrm>
-            <a:off x="594360" y="1837944"/>
-            <a:ext cx="11002975" cy="685800"/>
+            <a:off x="640080" y="1650492"/>
+            <a:ext cx="10911535" cy="731520"/>
           </a:xfrm>
           <a:prstGeom prst="rect">
             <a:avLst/>
@@ -4025,7 +3745,7 @@
           <a:p>
             <a:pPr algn="ctr"/>
             <a:r>
-              <a:rPr sz="4400" b="1" i="0">
+              <a:rPr sz="4800" b="1" i="0">
                 <a:solidFill>
                   <a:srgbClr val="FFFFFF"/>
                 </a:solidFill>
@@ -4044,8 +3764,8 @@
         </p:nvSpPr>
         <p:spPr>
           <a:xfrm>
-            <a:off x="594360" y="2560320"/>
-            <a:ext cx="11002975" cy="384048"/>
+            <a:off x="640080" y="2418588"/>
+            <a:ext cx="10911535" cy="365760"/>
           </a:xfrm>
           <a:prstGeom prst="rect">
             <a:avLst/>
@@ -4060,9 +3780,9 @@
           <a:p>
             <a:pPr algn="ctr"/>
             <a:r>
-              <a:rPr sz="2191" b="0" i="1">
+              <a:rPr sz="2400" b="0" i="1">
                 <a:solidFill>
-                  <a:srgbClr val="B4B4B4"/>
+                  <a:srgbClr val="AAAAAA"/>
                 </a:solidFill>
                 <a:latin typeface="Arial"/>
               </a:rPr>
@@ -4079,8 +3799,8 @@
         </p:nvSpPr>
         <p:spPr>
           <a:xfrm>
-            <a:off x="594360" y="2980944"/>
-            <a:ext cx="11002975" cy="347472"/>
+            <a:off x="640080" y="2985516"/>
+            <a:ext cx="10911535" cy="731520"/>
           </a:xfrm>
           <a:prstGeom prst="rect">
             <a:avLst/>
@@ -4095,13 +3815,13 @@
           <a:p>
             <a:pPr algn="ctr"/>
             <a:r>
-              <a:rPr sz="2000" b="0" i="1">
+              <a:rPr sz="4800" b="1" i="0">
                 <a:solidFill>
-                  <a:srgbClr val="8C8C8C"/>
+                  <a:srgbClr val="FFFFFF"/>
                 </a:solidFill>
                 <a:latin typeface="Arial"/>
               </a:rPr>
-              <a:t/>
+              <a:t>永遠までも御国で  ともに住ませてください</a:t>
             </a:r>
           </a:p>
         </p:txBody>
@@ -4114,8 +3834,8 @@
         </p:nvSpPr>
         <p:spPr>
           <a:xfrm>
-            <a:off x="594360" y="3529584"/>
-            <a:ext cx="11002975" cy="685800"/>
+            <a:off x="640080" y="3753612"/>
+            <a:ext cx="10911535" cy="365760"/>
           </a:xfrm>
           <a:prstGeom prst="rect">
             <a:avLst/>
@@ -4130,13 +3850,13 @@
           <a:p>
             <a:pPr algn="ctr"/>
             <a:r>
-              <a:rPr sz="4400" b="1" i="0">
+              <a:rPr sz="2400" b="0" i="1">
                 <a:solidFill>
-                  <a:srgbClr val="FFFFFF"/>
+                  <a:srgbClr val="AAAAAA"/>
                 </a:solidFill>
                 <a:latin typeface="Arial"/>
               </a:rPr>
-              <a:t>永遠までも御国で  ともに住ませてください</a:t>
+              <a:t>eien mademo mikuni de tomo ni sumasetekudasai</a:t>
             </a:r>
           </a:p>
         </p:txBody>
@@ -4149,8 +3869,8 @@
         </p:nvSpPr>
         <p:spPr>
           <a:xfrm>
-            <a:off x="594360" y="4251960"/>
-            <a:ext cx="11002975" cy="384048"/>
+            <a:off x="640080" y="4530852"/>
+            <a:ext cx="10911535" cy="310896"/>
           </a:xfrm>
           <a:prstGeom prst="rect">
             <a:avLst/>
@@ -4165,13 +3885,13 @@
           <a:p>
             <a:pPr algn="ctr"/>
             <a:r>
-              <a:rPr sz="2240" b="0" i="1">
+              <a:rPr sz="2000" b="0" i="1">
                 <a:solidFill>
-                  <a:srgbClr val="B4B4B4"/>
+                  <a:srgbClr val="828282"/>
                 </a:solidFill>
                 <a:latin typeface="Arial"/>
               </a:rPr>
-              <a:t>eien mademo mikuni de tomo ni sumasetekudasai</a:t>
+              <a:t>Num Berço de Palhas</a:t>
             </a:r>
           </a:p>
         </p:txBody>
@@ -4184,8 +3904,8 @@
         </p:nvSpPr>
         <p:spPr>
           <a:xfrm>
-            <a:off x="594360" y="4672584"/>
-            <a:ext cx="11002975" cy="347472"/>
+            <a:off x="640080" y="4896612"/>
+            <a:ext cx="10911535" cy="310896"/>
           </a:xfrm>
           <a:prstGeom prst="rect">
             <a:avLst/>
@@ -4202,11 +3922,11 @@
             <a:r>
               <a:rPr sz="2000" b="0" i="1">
                 <a:solidFill>
-                  <a:srgbClr val="8C8C8C"/>
+                  <a:srgbClr val="828282"/>
                 </a:solidFill>
                 <a:latin typeface="Arial"/>
               </a:rPr>
-              <a:t/>
+              <a:t>Num berço humilde, Jesus nasceu</a:t>
             </a:r>
           </a:p>
         </p:txBody>

--- a/output_pptx/Away_In_A_Manger.pptx
+++ b/output_pptx/Away_In_A_Manger.pptx
@@ -3171,6 +3171,76 @@
           </a:p>
         </p:txBody>
       </p:sp>
+      <p:sp>
+        <p:nvSpPr>
+          <p:cNvPr id="4" name="TextBox 3"/>
+          <p:cNvSpPr txBox="1"/>
+          <p:nvPr/>
+        </p:nvSpPr>
+        <p:spPr>
+          <a:xfrm>
+            <a:off x="640080" y="4128516"/>
+            <a:ext cx="10911535" cy="310896"/>
+          </a:xfrm>
+          <a:prstGeom prst="rect">
+            <a:avLst/>
+          </a:prstGeom>
+          <a:noFill/>
+        </p:spPr>
+        <p:txBody>
+          <a:bodyPr wrap="square">
+            <a:spAutoFit/>
+          </a:bodyPr>
+          <a:lstStyle/>
+          <a:p>
+            <a:pPr algn="ctr"/>
+            <a:r>
+              <a:rPr sz="2000" b="0" i="0">
+                <a:solidFill>
+                  <a:srgbClr val="828282"/>
+                </a:solidFill>
+                <a:latin typeface="Arial"/>
+              </a:rPr>
+              <a:t>藁のゆりかごで</a:t>
+            </a:r>
+          </a:p>
+        </p:txBody>
+      </p:sp>
+      <p:sp>
+        <p:nvSpPr>
+          <p:cNvPr id="5" name="TextBox 4"/>
+          <p:cNvSpPr txBox="1"/>
+          <p:nvPr/>
+        </p:nvSpPr>
+        <p:spPr>
+          <a:xfrm>
+            <a:off x="640080" y="4494276"/>
+            <a:ext cx="10911535" cy="310896"/>
+          </a:xfrm>
+          <a:prstGeom prst="rect">
+            <a:avLst/>
+          </a:prstGeom>
+          <a:noFill/>
+        </p:spPr>
+        <p:txBody>
+          <a:bodyPr wrap="square">
+            <a:spAutoFit/>
+          </a:bodyPr>
+          <a:lstStyle/>
+          <a:p>
+            <a:pPr algn="ctr"/>
+            <a:r>
+              <a:rPr sz="2000" b="0" i="0">
+                <a:solidFill>
+                  <a:srgbClr val="828282"/>
+                </a:solidFill>
+                <a:latin typeface="Arial"/>
+              </a:rPr>
+              <a:t>貧しいゆりかごで、イエスは生まれた</a:t>
+            </a:r>
+          </a:p>
+        </p:txBody>
+      </p:sp>
     </p:spTree>
   </p:cSld>
   <p:clrMapOvr>
@@ -3267,6 +3337,76 @@
           </a:p>
         </p:txBody>
       </p:sp>
+      <p:sp>
+        <p:nvSpPr>
+          <p:cNvPr id="4" name="TextBox 3"/>
+          <p:cNvSpPr txBox="1"/>
+          <p:nvPr/>
+        </p:nvSpPr>
+        <p:spPr>
+          <a:xfrm>
+            <a:off x="640080" y="4128516"/>
+            <a:ext cx="10911535" cy="310896"/>
+          </a:xfrm>
+          <a:prstGeom prst="rect">
+            <a:avLst/>
+          </a:prstGeom>
+          <a:noFill/>
+        </p:spPr>
+        <p:txBody>
+          <a:bodyPr wrap="square">
+            <a:spAutoFit/>
+          </a:bodyPr>
+          <a:lstStyle/>
+          <a:p>
+            <a:pPr algn="ctr"/>
+            <a:r>
+              <a:rPr sz="2000" b="0" i="0">
+                <a:solidFill>
+                  <a:srgbClr val="828282"/>
+                </a:solidFill>
+                <a:latin typeface="Arial"/>
+              </a:rPr>
+              <a:t>藁の上に彼の小さな体を寝かせた</a:t>
+            </a:r>
+          </a:p>
+        </p:txBody>
+      </p:sp>
+      <p:sp>
+        <p:nvSpPr>
+          <p:cNvPr id="5" name="TextBox 4"/>
+          <p:cNvSpPr txBox="1"/>
+          <p:nvPr/>
+        </p:nvSpPr>
+        <p:spPr>
+          <a:xfrm>
+            <a:off x="640080" y="4494276"/>
+            <a:ext cx="10911535" cy="310896"/>
+          </a:xfrm>
+          <a:prstGeom prst="rect">
+            <a:avLst/>
+          </a:prstGeom>
+          <a:noFill/>
+        </p:spPr>
+        <p:txBody>
+          <a:bodyPr wrap="square">
+            <a:spAutoFit/>
+          </a:bodyPr>
+          <a:lstStyle/>
+          <a:p>
+            <a:pPr algn="ctr"/>
+            <a:r>
+              <a:rPr sz="2000" b="0" i="0">
+                <a:solidFill>
+                  <a:srgbClr val="828282"/>
+                </a:solidFill>
+                <a:latin typeface="Arial"/>
+              </a:rPr>
+              <a:t>星々が輝き、光で照らしていた</a:t>
+            </a:r>
+          </a:p>
+        </p:txBody>
+      </p:sp>
     </p:spTree>
   </p:cSld>
   <p:clrMapOvr>
@@ -3599,6 +3739,76 @@
           </a:p>
         </p:txBody>
       </p:sp>
+      <p:sp>
+        <p:nvSpPr>
+          <p:cNvPr id="4" name="TextBox 3"/>
+          <p:cNvSpPr txBox="1"/>
+          <p:nvPr/>
+        </p:nvSpPr>
+        <p:spPr>
+          <a:xfrm>
+            <a:off x="640080" y="4128516"/>
+            <a:ext cx="10911535" cy="310896"/>
+          </a:xfrm>
+          <a:prstGeom prst="rect">
+            <a:avLst/>
+          </a:prstGeom>
+          <a:noFill/>
+        </p:spPr>
+        <p:txBody>
+          <a:bodyPr wrap="square">
+            <a:spAutoFit/>
+          </a:bodyPr>
+          <a:lstStyle/>
+          <a:p>
+            <a:pPr algn="ctr"/>
+            <a:r>
+              <a:rPr sz="2000" b="0" i="0">
+                <a:solidFill>
+                  <a:srgbClr val="828282"/>
+                </a:solidFill>
+                <a:latin typeface="Arial"/>
+              </a:rPr>
+              <a:t>美しい幼子、幼いイエスを</a:t>
+            </a:r>
+          </a:p>
+        </p:txBody>
+      </p:sp>
+      <p:sp>
+        <p:nvSpPr>
+          <p:cNvPr id="5" name="TextBox 4"/>
+          <p:cNvSpPr txBox="1"/>
+          <p:nvPr/>
+        </p:nvSpPr>
+        <p:spPr>
+          <a:xfrm>
+            <a:off x="640080" y="4494276"/>
+            <a:ext cx="10911535" cy="310896"/>
+          </a:xfrm>
+          <a:prstGeom prst="rect">
+            <a:avLst/>
+          </a:prstGeom>
+          <a:noFill/>
+        </p:spPr>
+        <p:txBody>
+          <a:bodyPr wrap="square">
+            <a:spAutoFit/>
+          </a:bodyPr>
+          <a:lstStyle/>
+          <a:p>
+            <a:pPr algn="ctr"/>
+            <a:r>
+              <a:rPr sz="2000" b="0" i="0">
+                <a:solidFill>
+                  <a:srgbClr val="828282"/>
+                </a:solidFill>
+                <a:latin typeface="Arial"/>
+              </a:rPr>
+              <a:t>牛たちが鳴き、イエスは目を覚ました</a:t>
+            </a:r>
+          </a:p>
+        </p:txBody>
+      </p:sp>
     </p:spTree>
   </p:cSld>
   <p:clrMapOvr>
@@ -3691,6 +3901,76 @@
                 <a:latin typeface="Arial"/>
               </a:rPr>
               <a:t>Jesus, eu Te amo; com Teu terno olhar</a:t>
+            </a:r>
+          </a:p>
+        </p:txBody>
+      </p:sp>
+      <p:sp>
+        <p:nvSpPr>
+          <p:cNvPr id="4" name="TextBox 3"/>
+          <p:cNvSpPr txBox="1"/>
+          <p:nvPr/>
+        </p:nvSpPr>
+        <p:spPr>
+          <a:xfrm>
+            <a:off x="640080" y="4128516"/>
+            <a:ext cx="10911535" cy="310896"/>
+          </a:xfrm>
+          <a:prstGeom prst="rect">
+            <a:avLst/>
+          </a:prstGeom>
+          <a:noFill/>
+        </p:spPr>
+        <p:txBody>
+          <a:bodyPr wrap="square">
+            <a:spAutoFit/>
+          </a:bodyPr>
+          <a:lstStyle/>
+          <a:p>
+            <a:pPr algn="ctr"/>
+            <a:r>
+              <a:rPr sz="2000" b="0" i="0">
+                <a:solidFill>
+                  <a:srgbClr val="828282"/>
+                </a:solidFill>
+                <a:latin typeface="Arial"/>
+              </a:rPr>
+              <a:t>だが彼は穏やかで、驚くことはなかった</a:t>
+            </a:r>
+          </a:p>
+        </p:txBody>
+      </p:sp>
+      <p:sp>
+        <p:nvSpPr>
+          <p:cNvPr id="5" name="TextBox 4"/>
+          <p:cNvSpPr txBox="1"/>
+          <p:nvPr/>
+        </p:nvSpPr>
+        <p:spPr>
+          <a:xfrm>
+            <a:off x="640080" y="4494276"/>
+            <a:ext cx="10911535" cy="310896"/>
+          </a:xfrm>
+          <a:prstGeom prst="rect">
+            <a:avLst/>
+          </a:prstGeom>
+          <a:noFill/>
+        </p:spPr>
+        <p:txBody>
+          <a:bodyPr wrap="square">
+            <a:spAutoFit/>
+          </a:bodyPr>
+          <a:lstStyle/>
+          <a:p>
+            <a:pPr algn="ctr"/>
+            <a:r>
+              <a:rPr sz="2000" b="0" i="0">
+                <a:solidFill>
+                  <a:srgbClr val="828282"/>
+                </a:solidFill>
+                <a:latin typeface="Arial"/>
+              </a:rPr>
+              <a:t>イエスよ、私はあなたを愛します；あなたの優しい眼差しで</a:t>
             </a:r>
           </a:p>
         </p:txBody>
